--- a/public/fun/cards/creative/creative-07.pptx
+++ b/public/fun/cards/creative/creative-07.pptx
@@ -3085,7 +3085,7 @@
     <p:bg>
       <p:bgPr>
         <a:solidFill>
-          <a:srgbClr val="FBF8F2"/>
+          <a:srgbClr val="F2EAFE"/>
         </a:solidFill>
         <a:effectLst/>
       </p:bgPr>
@@ -3099,23 +3099,23 @@
       <p:grpSpPr/>
       <p:sp>
         <p:nvSpPr>
-          <p:cNvPr id="2" name="Rectangle 1"/>
+          <p:cNvPr id="2" name="Oval 1"/>
           <p:cNvSpPr/>
           <p:nvPr/>
         </p:nvSpPr>
         <p:spPr>
           <a:xfrm>
-            <a:off x="93600" y="93600"/>
-            <a:ext cx="3052800" cy="1612800"/>
+            <a:off x="547200" y="475200"/>
+            <a:ext cx="849600" cy="849600"/>
           </a:xfrm>
-          <a:prstGeom prst="rect">
+          <a:prstGeom prst="ellipse">
             <a:avLst/>
           </a:prstGeom>
-          <a:noFill/>
-          <a:ln w="10800">
-            <a:solidFill>
-              <a:srgbClr val="3B8391"/>
-            </a:solidFill>
+          <a:solidFill>
+            <a:srgbClr val="E1CFFD"/>
+          </a:solidFill>
+          <a:ln>
+            <a:noFill/>
           </a:ln>
         </p:spPr>
         <p:txBody>
@@ -3128,23 +3128,25 @@
       </p:sp>
       <p:sp>
         <p:nvSpPr>
-          <p:cNvPr id="3" name="Rectangle 2"/>
+          <p:cNvPr id="3" name="Oval 2"/>
           <p:cNvSpPr/>
           <p:nvPr/>
         </p:nvSpPr>
         <p:spPr>
           <a:xfrm>
-            <a:off x="144000" y="144000"/>
-            <a:ext cx="2952000" cy="1512000"/>
+            <a:off x="187200" y="475200"/>
+            <a:ext cx="849600" cy="849600"/>
           </a:xfrm>
-          <a:prstGeom prst="rect">
+          <a:prstGeom prst="ellipse">
             <a:avLst/>
           </a:prstGeom>
-          <a:noFill/>
-          <a:ln w="5400">
-            <a:solidFill>
-              <a:srgbClr val="C8DCE0"/>
-            </a:solidFill>
+          <a:solidFill>
+            <a:srgbClr val="7A2CF5">
+              <a:alpha val="92000"/>
+            </a:srgbClr>
+          </a:solidFill>
+          <a:ln>
+            <a:noFill/>
           </a:ln>
         </p:spPr>
         <p:txBody>
@@ -3163,8 +3165,8 @@
         </p:nvSpPr>
         <p:spPr>
           <a:xfrm>
-            <a:off x="360000" y="280800"/>
-            <a:ext cx="2520000" cy="100800"/>
+            <a:off x="1692000" y="223200"/>
+            <a:ext cx="1296000" cy="133351"/>
           </a:xfrm>
           <a:prstGeom prst="rect">
             <a:avLst/>
@@ -3177,15 +3179,15 @@
           </a:bodyPr>
           <a:lstStyle/>
           <a:p>
-            <a:pPr algn="ctr">
+            <a:pPr algn="l">
               <a:lnSpc>
                 <a:spcPts val="1015"/>
               </a:lnSpc>
             </a:pPr>
             <a:r>
-              <a:rPr sz="700" b="1" spc="400">
+              <a:rPr sz="700" b="1" spc="200">
                 <a:solidFill>
-                  <a:srgbClr val="81704E"/>
+                  <a:srgbClr val="3A1E6E"/>
                 </a:solidFill>
                 <a:latin typeface="맑은 고딕"/>
                 <a:ea typeface="맑은 고딕"/>
@@ -3203,8 +3205,8 @@
         </p:nvSpPr>
         <p:spPr>
           <a:xfrm>
-            <a:off x="360000" y="468000"/>
-            <a:ext cx="2520000" cy="313692"/>
+            <a:off x="1692000" y="540000"/>
+            <a:ext cx="1368000" cy="360000"/>
           </a:xfrm>
           <a:prstGeom prst="rect">
             <a:avLst/>
@@ -3217,18 +3219,18 @@
           </a:bodyPr>
           <a:lstStyle/>
           <a:p>
-            <a:pPr algn="ctr">
+            <a:pPr algn="l">
               <a:lnSpc>
-                <a:spcPts val="2755"/>
+                <a:spcPts val="3190"/>
               </a:lnSpc>
             </a:pPr>
             <a:r>
-              <a:rPr sz="1900" b="1" spc="50">
+              <a:rPr sz="2200" b="1">
                 <a:solidFill>
-                  <a:srgbClr val="715214"/>
+                  <a:srgbClr val="12151C"/>
                 </a:solidFill>
-                <a:latin typeface="바탕"/>
-                <a:ea typeface="바탕"/>
+                <a:latin typeface="맑은 고딕"/>
+                <a:ea typeface="맑은 고딕"/>
               </a:rPr>
               <a:t>조하린</a:t>
             </a:r>
@@ -3243,8 +3245,8 @@
         </p:nvSpPr>
         <p:spPr>
           <a:xfrm>
-            <a:off x="360000" y="784800"/>
-            <a:ext cx="2520000" cy="122400"/>
+            <a:off x="1692000" y="943200"/>
+            <a:ext cx="1368000" cy="171451"/>
           </a:xfrm>
           <a:prstGeom prst="rect">
             <a:avLst/>
@@ -3257,15 +3259,15 @@
           </a:bodyPr>
           <a:lstStyle/>
           <a:p>
-            <a:pPr algn="ctr">
+            <a:pPr algn="l">
               <a:lnSpc>
-                <a:spcPts val="1232"/>
+                <a:spcPts val="1305"/>
               </a:lnSpc>
             </a:pPr>
             <a:r>
-              <a:rPr sz="850" b="1">
+              <a:rPr sz="900" b="0">
                 <a:solidFill>
-                  <a:srgbClr val="357682"/>
+                  <a:srgbClr val="3A1E6E"/>
                 </a:solidFill>
                 <a:latin typeface="맑은 고딕"/>
                 <a:ea typeface="맑은 고딕"/>
@@ -3283,14 +3285,14 @@
         </p:nvSpPr>
         <p:spPr>
           <a:xfrm>
-            <a:off x="1530000" y="993600"/>
-            <a:ext cx="180000" cy="10800"/>
+            <a:off x="1692000" y="1195200"/>
+            <a:ext cx="144000" cy="18000"/>
           </a:xfrm>
           <a:prstGeom prst="rect">
             <a:avLst/>
           </a:prstGeom>
           <a:solidFill>
-            <a:srgbClr val="3B8391"/>
+            <a:srgbClr val="7A2CF5"/>
           </a:solidFill>
           <a:ln>
             <a:noFill/>
@@ -3312,8 +3314,8 @@
         </p:nvSpPr>
         <p:spPr>
           <a:xfrm>
-            <a:off x="360000" y="1087200"/>
-            <a:ext cx="2520000" cy="108000"/>
+            <a:off x="1692000" y="1328400"/>
+            <a:ext cx="331200" cy="99061"/>
           </a:xfrm>
           <a:prstGeom prst="rect">
             <a:avLst/>
@@ -3326,20 +3328,20 @@
           </a:bodyPr>
           <a:lstStyle/>
           <a:p>
-            <a:pPr algn="ctr">
+            <a:pPr algn="l">
               <a:lnSpc>
-                <a:spcPts val="1087"/>
+                <a:spcPts val="754"/>
               </a:lnSpc>
             </a:pPr>
             <a:r>
-              <a:rPr sz="750" b="0">
+              <a:rPr sz="520" b="1" spc="120">
                 <a:solidFill>
-                  <a:srgbClr val="715214"/>
+                  <a:srgbClr val="3A1E6E"/>
                 </a:solidFill>
                 <a:latin typeface="맑은 고딕"/>
                 <a:ea typeface="맑은 고딕"/>
               </a:rPr>
-              <a:t>010-1234-5678</a:t>
+              <a:t>TEL</a:t>
             </a:r>
           </a:p>
         </p:txBody>
@@ -3352,8 +3354,8 @@
         </p:nvSpPr>
         <p:spPr>
           <a:xfrm>
-            <a:off x="360000" y="1209600"/>
-            <a:ext cx="2520000" cy="108000"/>
+            <a:off x="2023200" y="1317600"/>
+            <a:ext cx="1188000" cy="125731"/>
           </a:xfrm>
           <a:prstGeom prst="rect">
             <a:avLst/>
@@ -3366,20 +3368,20 @@
           </a:bodyPr>
           <a:lstStyle/>
           <a:p>
-            <a:pPr algn="ctr">
+            <a:pPr algn="l">
               <a:lnSpc>
-                <a:spcPts val="1087"/>
+                <a:spcPts val="956"/>
               </a:lnSpc>
             </a:pPr>
             <a:r>
-              <a:rPr sz="750" b="0">
+              <a:rPr sz="660" b="0">
                 <a:solidFill>
-                  <a:srgbClr val="715214"/>
+                  <a:srgbClr val="12151C"/>
                 </a:solidFill>
                 <a:latin typeface="맑은 고딕"/>
                 <a:ea typeface="맑은 고딕"/>
               </a:rPr>
-              <a:t>name@example.com</a:t>
+              <a:t>010-1234-5678</a:t>
             </a:r>
           </a:p>
         </p:txBody>
@@ -3392,8 +3394,8 @@
         </p:nvSpPr>
         <p:spPr>
           <a:xfrm>
-            <a:off x="360000" y="1332000"/>
-            <a:ext cx="2520000" cy="108000"/>
+            <a:off x="1692000" y="1458000"/>
+            <a:ext cx="331200" cy="99061"/>
           </a:xfrm>
           <a:prstGeom prst="rect">
             <a:avLst/>
@@ -3406,168 +3408,141 @@
           </a:bodyPr>
           <a:lstStyle/>
           <a:p>
-            <a:pPr algn="ctr">
+            <a:pPr algn="l">
               <a:lnSpc>
-                <a:spcPts val="1015"/>
+                <a:spcPts val="754"/>
               </a:lnSpc>
             </a:pPr>
             <a:r>
-              <a:rPr sz="700" b="0">
+              <a:rPr sz="520" b="1" spc="120">
                 <a:solidFill>
-                  <a:srgbClr val="81704E"/>
+                  <a:srgbClr val="3A1E6E"/>
+                </a:solidFill>
+                <a:latin typeface="맑은 고딕"/>
+                <a:ea typeface="맑은 고딕"/>
+              </a:rPr>
+              <a:t>MAIL</a:t>
+            </a:r>
+          </a:p>
+        </p:txBody>
+      </p:sp>
+      <p:sp>
+        <p:nvSpPr>
+          <p:cNvPr id="11" name="텍스트"/>
+          <p:cNvSpPr txBox="1"/>
+          <p:nvPr/>
+        </p:nvSpPr>
+        <p:spPr>
+          <a:xfrm>
+            <a:off x="2023200" y="1447200"/>
+            <a:ext cx="1188000" cy="125731"/>
+          </a:xfrm>
+          <a:prstGeom prst="rect">
+            <a:avLst/>
+          </a:prstGeom>
+          <a:noFill/>
+        </p:spPr>
+        <p:txBody>
+          <a:bodyPr wrap="square" lIns="0" rIns="0" tIns="0" bIns="0" anchor="t">
+            <a:spAutoFit/>
+          </a:bodyPr>
+          <a:lstStyle/>
+          <a:p>
+            <a:pPr algn="l">
+              <a:lnSpc>
+                <a:spcPts val="956"/>
+              </a:lnSpc>
+            </a:pPr>
+            <a:r>
+              <a:rPr sz="660" b="0">
+                <a:solidFill>
+                  <a:srgbClr val="12151C"/>
+                </a:solidFill>
+                <a:latin typeface="맑은 고딕"/>
+                <a:ea typeface="맑은 고딕"/>
+              </a:rPr>
+              <a:t>name@example.com</a:t>
+            </a:r>
+          </a:p>
+        </p:txBody>
+      </p:sp>
+      <p:sp>
+        <p:nvSpPr>
+          <p:cNvPr id="12" name="텍스트"/>
+          <p:cNvSpPr txBox="1"/>
+          <p:nvPr/>
+        </p:nvSpPr>
+        <p:spPr>
+          <a:xfrm>
+            <a:off x="1692000" y="1587600"/>
+            <a:ext cx="331200" cy="99061"/>
+          </a:xfrm>
+          <a:prstGeom prst="rect">
+            <a:avLst/>
+          </a:prstGeom>
+          <a:noFill/>
+        </p:spPr>
+        <p:txBody>
+          <a:bodyPr wrap="square" lIns="0" rIns="0" tIns="0" bIns="0" anchor="t">
+            <a:spAutoFit/>
+          </a:bodyPr>
+          <a:lstStyle/>
+          <a:p>
+            <a:pPr algn="l">
+              <a:lnSpc>
+                <a:spcPts val="754"/>
+              </a:lnSpc>
+            </a:pPr>
+            <a:r>
+              <a:rPr sz="520" b="1" spc="120">
+                <a:solidFill>
+                  <a:srgbClr val="3A1E6E"/>
+                </a:solidFill>
+                <a:latin typeface="맑은 고딕"/>
+                <a:ea typeface="맑은 고딕"/>
+              </a:rPr>
+              <a:t>ADDR</a:t>
+            </a:r>
+          </a:p>
+        </p:txBody>
+      </p:sp>
+      <p:sp>
+        <p:nvSpPr>
+          <p:cNvPr id="13" name="텍스트"/>
+          <p:cNvSpPr txBox="1"/>
+          <p:nvPr/>
+        </p:nvSpPr>
+        <p:spPr>
+          <a:xfrm>
+            <a:off x="2023200" y="1576800"/>
+            <a:ext cx="1188000" cy="125731"/>
+          </a:xfrm>
+          <a:prstGeom prst="rect">
+            <a:avLst/>
+          </a:prstGeom>
+          <a:noFill/>
+        </p:spPr>
+        <p:txBody>
+          <a:bodyPr wrap="square" lIns="0" rIns="0" tIns="0" bIns="0" anchor="t">
+            <a:spAutoFit/>
+          </a:bodyPr>
+          <a:lstStyle/>
+          <a:p>
+            <a:pPr algn="l">
+              <a:lnSpc>
+                <a:spcPts val="956"/>
+              </a:lnSpc>
+            </a:pPr>
+            <a:r>
+              <a:rPr sz="660" b="0">
+                <a:solidFill>
+                  <a:srgbClr val="12151C"/>
                 </a:solidFill>
                 <a:latin typeface="맑은 고딕"/>
                 <a:ea typeface="맑은 고딕"/>
               </a:rPr>
               <a:t>주소를 입력해 주세요</a:t>
             </a:r>
-          </a:p>
-        </p:txBody>
-      </p:sp>
-      <p:sp>
-        <p:nvSpPr>
-          <p:cNvPr id="11" name="Freeform 10"/>
-          <p:cNvSpPr/>
-          <p:nvPr/>
-        </p:nvSpPr>
-        <p:spPr>
-          <a:xfrm>
-            <a:off x="1590175" y="1497289"/>
-            <a:ext cx="75478" cy="82559"/>
-          </a:xfrm>
-          <a:custGeom>
-            <a:avLst/>
-            <a:gdLst/>
-            <a:ahLst/>
-            <a:cxnLst/>
-            <a:rect l="l" t="t" r="r" b="b"/>
-            <a:pathLst>
-              <a:path w="75478" h="82559">
-                <a:moveTo>
-                  <a:pt x="54519" y="0"/>
-                </a:moveTo>
-                <a:lnTo>
-                  <a:pt x="75478" y="17586"/>
-                </a:lnTo>
-                <a:lnTo>
-                  <a:pt x="20959" y="82559"/>
-                </a:lnTo>
-                <a:lnTo>
-                  <a:pt x="0" y="64973"/>
-                </a:lnTo>
-                <a:close/>
-              </a:path>
-            </a:pathLst>
-          </a:custGeom>
-          <a:solidFill>
-            <a:srgbClr val="3B8391"/>
-          </a:solidFill>
-          <a:ln>
-            <a:noFill/>
-          </a:ln>
-        </p:spPr>
-        <p:txBody>
-          <a:bodyPr rtlCol="0" anchor="ctr"/>
-          <a:lstStyle/>
-          <a:p>
-            <a:pPr algn="ctr"/>
-          </a:p>
-        </p:txBody>
-      </p:sp>
-      <p:sp>
-        <p:nvSpPr>
-          <p:cNvPr id="12" name="Freeform 11"/>
-          <p:cNvSpPr/>
-          <p:nvPr/>
-        </p:nvSpPr>
-        <p:spPr>
-          <a:xfrm>
-            <a:off x="1581309" y="1562262"/>
-            <a:ext cx="29825" cy="31848"/>
-          </a:xfrm>
-          <a:custGeom>
-            <a:avLst/>
-            <a:gdLst/>
-            <a:ahLst/>
-            <a:cxnLst/>
-            <a:rect l="l" t="t" r="r" b="b"/>
-            <a:pathLst>
-              <a:path w="29825" h="31848">
-                <a:moveTo>
-                  <a:pt x="8866" y="0"/>
-                </a:moveTo>
-                <a:lnTo>
-                  <a:pt x="29825" y="17586"/>
-                </a:lnTo>
-                <a:lnTo>
-                  <a:pt x="0" y="31848"/>
-                </a:lnTo>
-                <a:close/>
-              </a:path>
-            </a:pathLst>
-          </a:custGeom>
-          <a:solidFill>
-            <a:srgbClr val="C8DCE0"/>
-          </a:solidFill>
-          <a:ln>
-            <a:noFill/>
-          </a:ln>
-        </p:spPr>
-        <p:txBody>
-          <a:bodyPr rtlCol="0" anchor="ctr"/>
-          <a:lstStyle/>
-          <a:p>
-            <a:pPr algn="ctr"/>
-          </a:p>
-        </p:txBody>
-      </p:sp>
-      <p:sp>
-        <p:nvSpPr>
-          <p:cNvPr id="13" name="Freeform 12"/>
-          <p:cNvSpPr/>
-          <p:nvPr/>
-        </p:nvSpPr>
-        <p:spPr>
-          <a:xfrm>
-            <a:off x="1644694" y="1486809"/>
-            <a:ext cx="29752" cy="28066"/>
-          </a:xfrm>
-          <a:custGeom>
-            <a:avLst/>
-            <a:gdLst/>
-            <a:ahLst/>
-            <a:cxnLst/>
-            <a:rect l="l" t="t" r="r" b="b"/>
-            <a:pathLst>
-              <a:path w="29752" h="28066">
-                <a:moveTo>
-                  <a:pt x="8793" y="0"/>
-                </a:moveTo>
-                <a:lnTo>
-                  <a:pt x="29752" y="17587"/>
-                </a:lnTo>
-                <a:lnTo>
-                  <a:pt x="20959" y="28066"/>
-                </a:lnTo>
-                <a:lnTo>
-                  <a:pt x="0" y="10480"/>
-                </a:lnTo>
-                <a:close/>
-              </a:path>
-            </a:pathLst>
-          </a:custGeom>
-          <a:solidFill>
-            <a:srgbClr val="C8DCE0"/>
-          </a:solidFill>
-          <a:ln>
-            <a:noFill/>
-          </a:ln>
-        </p:spPr>
-        <p:txBody>
-          <a:bodyPr rtlCol="0" anchor="ctr"/>
-          <a:lstStyle/>
-          <a:p>
-            <a:pPr algn="ctr"/>
           </a:p>
         </p:txBody>
       </p:sp>
@@ -3585,7 +3560,7 @@
     <p:bg>
       <p:bgPr>
         <a:solidFill>
-          <a:srgbClr val="FCF7EE"/>
+          <a:srgbClr val="0E1116"/>
         </a:solidFill>
         <a:effectLst/>
       </p:bgPr>
@@ -3599,20 +3574,77 @@
       <p:grpSpPr/>
       <p:sp>
         <p:nvSpPr>
-          <p:cNvPr id="2" name="Rectangle 1"/>
+          <p:cNvPr id="2" name="텍스트"/>
+          <p:cNvSpPr txBox="1"/>
+          <p:nvPr/>
+        </p:nvSpPr>
+        <p:spPr>
+          <a:xfrm>
+            <a:off x="252000" y="324000"/>
+            <a:ext cx="2520000" cy="792000"/>
+          </a:xfrm>
+          <a:prstGeom prst="rect">
+            <a:avLst/>
+          </a:prstGeom>
+          <a:noFill/>
+        </p:spPr>
+        <p:txBody>
+          <a:bodyPr wrap="square" lIns="0" rIns="0" tIns="0" bIns="0" anchor="t">
+            <a:spAutoFit/>
+          </a:bodyPr>
+          <a:lstStyle/>
+          <a:p>
+            <a:pPr algn="l">
+              <a:lnSpc>
+                <a:spcPts val="1884"/>
+              </a:lnSpc>
+            </a:pPr>
+            <a:r>
+              <a:rPr sz="1300" b="1">
+                <a:solidFill>
+                  <a:srgbClr val="FFFFFF"/>
+                </a:solidFill>
+                <a:latin typeface="맑은 고딕"/>
+                <a:ea typeface="맑은 고딕"/>
+              </a:rPr>
+              <a:t>보이지 않던 가치를</a:t>
+            </a:r>
+          </a:p>
+          <a:p>
+            <a:pPr algn="l">
+              <a:lnSpc>
+                <a:spcPts val="1884"/>
+              </a:lnSpc>
+            </a:pPr>
+            <a:r>
+              <a:rPr sz="1300" b="1">
+                <a:solidFill>
+                  <a:srgbClr val="FFFFFF"/>
+                </a:solidFill>
+                <a:latin typeface="맑은 고딕"/>
+                <a:ea typeface="맑은 고딕"/>
+              </a:rPr>
+              <a:t>보이게 합니다</a:t>
+            </a:r>
+          </a:p>
+        </p:txBody>
+      </p:sp>
+      <p:sp>
+        <p:nvSpPr>
+          <p:cNvPr id="3" name="Rectangle 2"/>
           <p:cNvSpPr/>
           <p:nvPr/>
         </p:nvSpPr>
         <p:spPr>
           <a:xfrm>
-            <a:off x="0" y="0"/>
-            <a:ext cx="1224000" cy="1800000"/>
+            <a:off x="0" y="1476000"/>
+            <a:ext cx="3240000" cy="324000"/>
           </a:xfrm>
           <a:prstGeom prst="rect">
             <a:avLst/>
           </a:prstGeom>
           <a:solidFill>
-            <a:srgbClr val="C79123"/>
+            <a:srgbClr val="985BF7"/>
           </a:solidFill>
           <a:ln>
             <a:noFill/>
@@ -3628,39 +3660,58 @@
       </p:sp>
       <p:sp>
         <p:nvSpPr>
-          <p:cNvPr id="3" name="Freeform 2"/>
+          <p:cNvPr id="4" name="텍스트"/>
+          <p:cNvSpPr txBox="1"/>
+          <p:nvPr/>
+        </p:nvSpPr>
+        <p:spPr>
+          <a:xfrm>
+            <a:off x="252000" y="1569600"/>
+            <a:ext cx="1872000" cy="142876"/>
+          </a:xfrm>
+          <a:prstGeom prst="rect">
+            <a:avLst/>
+          </a:prstGeom>
+          <a:noFill/>
+        </p:spPr>
+        <p:txBody>
+          <a:bodyPr wrap="square" lIns="0" rIns="0" tIns="0" bIns="0" anchor="t">
+            <a:spAutoFit/>
+          </a:bodyPr>
+          <a:lstStyle/>
+          <a:p>
+            <a:pPr algn="l">
+              <a:lnSpc>
+                <a:spcPts val="1087"/>
+              </a:lnSpc>
+            </a:pPr>
+            <a:r>
+              <a:rPr sz="750" b="1" spc="200">
+                <a:solidFill>
+                  <a:srgbClr val="FFFFFF"/>
+                </a:solidFill>
+                <a:latin typeface="맑은 고딕"/>
+                <a:ea typeface="맑은 고딕"/>
+              </a:rPr>
+              <a:t>스튜디오 이름</a:t>
+            </a:r>
+          </a:p>
+        </p:txBody>
+      </p:sp>
+      <p:sp>
+        <p:nvSpPr>
+          <p:cNvPr id="5" name="Oval 4"/>
           <p:cNvSpPr/>
           <p:nvPr/>
         </p:nvSpPr>
         <p:spPr>
           <a:xfrm>
-            <a:off x="494270" y="699824"/>
-            <a:ext cx="297939" cy="325893"/>
+            <a:off x="2714400" y="1616400"/>
+            <a:ext cx="43200" cy="43200"/>
           </a:xfrm>
-          <a:custGeom>
+          <a:prstGeom prst="ellipse">
             <a:avLst/>
-            <a:gdLst/>
-            <a:ahLst/>
-            <a:cxnLst/>
-            <a:rect l="l" t="t" r="r" b="b"/>
-            <a:pathLst>
-              <a:path w="297939" h="325893">
-                <a:moveTo>
-                  <a:pt x="215206" y="0"/>
-                </a:moveTo>
-                <a:lnTo>
-                  <a:pt x="297939" y="69421"/>
-                </a:lnTo>
-                <a:lnTo>
-                  <a:pt x="82733" y="325893"/>
-                </a:lnTo>
-                <a:lnTo>
-                  <a:pt x="0" y="256472"/>
-                </a:lnTo>
-                <a:close/>
-              </a:path>
-            </a:pathLst>
-          </a:custGeom>
+          </a:prstGeom>
           <a:solidFill>
             <a:srgbClr val="FFFFFF"/>
           </a:solidFill>
@@ -3678,38 +3729,22 @@
       </p:sp>
       <p:sp>
         <p:nvSpPr>
-          <p:cNvPr id="4" name="Freeform 3"/>
+          <p:cNvPr id="6" name="Oval 5"/>
           <p:cNvSpPr/>
           <p:nvPr/>
         </p:nvSpPr>
         <p:spPr>
           <a:xfrm>
-            <a:off x="459274" y="956296"/>
-            <a:ext cx="117729" cy="125716"/>
+            <a:off x="2822400" y="1616400"/>
+            <a:ext cx="43200" cy="43200"/>
           </a:xfrm>
-          <a:custGeom>
+          <a:prstGeom prst="ellipse">
             <a:avLst/>
-            <a:gdLst/>
-            <a:ahLst/>
-            <a:cxnLst/>
-            <a:rect l="l" t="t" r="r" b="b"/>
-            <a:pathLst>
-              <a:path w="117729" h="125716">
-                <a:moveTo>
-                  <a:pt x="34996" y="0"/>
-                </a:moveTo>
-                <a:lnTo>
-                  <a:pt x="117729" y="69421"/>
-                </a:lnTo>
-                <a:lnTo>
-                  <a:pt x="0" y="125716"/>
-                </a:lnTo>
-                <a:close/>
-              </a:path>
-            </a:pathLst>
-          </a:custGeom>
+          </a:prstGeom>
           <a:solidFill>
-            <a:srgbClr val="808080"/>
+            <a:srgbClr val="FFFFFF">
+              <a:alpha val="50000"/>
+            </a:srgbClr>
           </a:solidFill>
           <a:ln>
             <a:noFill/>
@@ -3725,41 +3760,22 @@
       </p:sp>
       <p:sp>
         <p:nvSpPr>
-          <p:cNvPr id="5" name="Freeform 4"/>
+          <p:cNvPr id="7" name="Oval 6"/>
           <p:cNvSpPr/>
           <p:nvPr/>
         </p:nvSpPr>
         <p:spPr>
           <a:xfrm>
-            <a:off x="709476" y="658457"/>
-            <a:ext cx="117443" cy="110788"/>
+            <a:off x="2930400" y="1616400"/>
+            <a:ext cx="43200" cy="43200"/>
           </a:xfrm>
-          <a:custGeom>
+          <a:prstGeom prst="ellipse">
             <a:avLst/>
-            <a:gdLst/>
-            <a:ahLst/>
-            <a:cxnLst/>
-            <a:rect l="l" t="t" r="r" b="b"/>
-            <a:pathLst>
-              <a:path w="117443" h="110788">
-                <a:moveTo>
-                  <a:pt x="34710" y="0"/>
-                </a:moveTo>
-                <a:lnTo>
-                  <a:pt x="117443" y="69422"/>
-                </a:lnTo>
-                <a:lnTo>
-                  <a:pt x="82733" y="110788"/>
-                </a:lnTo>
-                <a:lnTo>
-                  <a:pt x="0" y="41367"/>
-                </a:lnTo>
-                <a:close/>
-              </a:path>
-            </a:pathLst>
-          </a:custGeom>
+          </a:prstGeom>
           <a:solidFill>
-            <a:srgbClr val="808080"/>
+            <a:srgbClr val="FFFFFF">
+              <a:alpha val="50000"/>
+            </a:srgbClr>
           </a:solidFill>
           <a:ln>
             <a:noFill/>
@@ -3770,132 +3786,6 @@
           <a:lstStyle/>
           <a:p>
             <a:pPr algn="ctr"/>
-          </a:p>
-        </p:txBody>
-      </p:sp>
-      <p:sp>
-        <p:nvSpPr>
-          <p:cNvPr id="6" name="텍스트"/>
-          <p:cNvSpPr txBox="1"/>
-          <p:nvPr/>
-        </p:nvSpPr>
-        <p:spPr>
-          <a:xfrm>
-            <a:off x="1440000" y="432000"/>
-            <a:ext cx="1584000" cy="792000"/>
-          </a:xfrm>
-          <a:prstGeom prst="rect">
-            <a:avLst/>
-          </a:prstGeom>
-          <a:noFill/>
-        </p:spPr>
-        <p:txBody>
-          <a:bodyPr wrap="square" lIns="0" rIns="0" tIns="0" bIns="0" anchor="ctr">
-            <a:spAutoFit/>
-          </a:bodyPr>
-          <a:lstStyle/>
-          <a:p>
-            <a:pPr algn="l">
-              <a:lnSpc>
-                <a:spcPts val="1667"/>
-              </a:lnSpc>
-            </a:pPr>
-            <a:r>
-              <a:rPr sz="1150" b="1">
-                <a:solidFill>
-                  <a:srgbClr val="715214"/>
-                </a:solidFill>
-                <a:latin typeface="맑은 고딕"/>
-                <a:ea typeface="맑은 고딕"/>
-              </a:rPr>
-              <a:t>보이지 않던 가치를</a:t>
-            </a:r>
-          </a:p>
-          <a:p>
-            <a:pPr algn="l">
-              <a:lnSpc>
-                <a:spcPts val="1667"/>
-              </a:lnSpc>
-            </a:pPr>
-            <a:r>
-              <a:rPr sz="1150" b="1">
-                <a:solidFill>
-                  <a:srgbClr val="715214"/>
-                </a:solidFill>
-                <a:latin typeface="맑은 고딕"/>
-                <a:ea typeface="맑은 고딕"/>
-              </a:rPr>
-              <a:t>보이게 합니다</a:t>
-            </a:r>
-          </a:p>
-        </p:txBody>
-      </p:sp>
-      <p:sp>
-        <p:nvSpPr>
-          <p:cNvPr id="7" name="Rectangle 6"/>
-          <p:cNvSpPr/>
-          <p:nvPr/>
-        </p:nvSpPr>
-        <p:spPr>
-          <a:xfrm>
-            <a:off x="1440000" y="1317600"/>
-            <a:ext cx="180000" cy="10800"/>
-          </a:xfrm>
-          <a:prstGeom prst="rect">
-            <a:avLst/>
-          </a:prstGeom>
-          <a:solidFill>
-            <a:srgbClr val="C79123"/>
-          </a:solidFill>
-          <a:ln>
-            <a:noFill/>
-          </a:ln>
-        </p:spPr>
-        <p:txBody>
-          <a:bodyPr rtlCol="0" anchor="ctr"/>
-          <a:lstStyle/>
-          <a:p>
-            <a:pPr algn="ctr"/>
-          </a:p>
-        </p:txBody>
-      </p:sp>
-      <p:sp>
-        <p:nvSpPr>
-          <p:cNvPr id="8" name="텍스트"/>
-          <p:cNvSpPr txBox="1"/>
-          <p:nvPr/>
-        </p:nvSpPr>
-        <p:spPr>
-          <a:xfrm>
-            <a:off x="1440000" y="1418400"/>
-            <a:ext cx="1584000" cy="108000"/>
-          </a:xfrm>
-          <a:prstGeom prst="rect">
-            <a:avLst/>
-          </a:prstGeom>
-          <a:noFill/>
-        </p:spPr>
-        <p:txBody>
-          <a:bodyPr wrap="square" lIns="0" rIns="0" tIns="0" bIns="0" anchor="t">
-            <a:spAutoFit/>
-          </a:bodyPr>
-          <a:lstStyle/>
-          <a:p>
-            <a:pPr algn="l">
-              <a:lnSpc>
-                <a:spcPts val="1087"/>
-              </a:lnSpc>
-            </a:pPr>
-            <a:r>
-              <a:rPr sz="750" b="1" spc="200">
-                <a:solidFill>
-                  <a:srgbClr val="7A6948"/>
-                </a:solidFill>
-                <a:latin typeface="맑은 고딕"/>
-                <a:ea typeface="맑은 고딕"/>
-              </a:rPr>
-              <a:t>스튜디오 이름</a:t>
-            </a:r>
           </a:p>
         </p:txBody>
       </p:sp>

--- a/public/fun/cards/creative/creative-07.pptx
+++ b/public/fun/cards/creative/creative-07.pptx
@@ -3097,196 +3097,37 @@
         <p:nvPr/>
       </p:nvGrpSpPr>
       <p:grpSpPr/>
-      <p:sp>
-        <p:nvSpPr>
-          <p:cNvPr id="2" name="Oval 1"/>
+      <p:cxnSp>
+        <p:nvCxnSpPr>
+          <p:cNvPr id="2" name="Connector 1"/>
+          <p:cNvCxnSpPr/>
+          <p:nvPr/>
+        </p:nvCxnSpPr>
+        <p:spPr>
+          <a:xfrm>
+            <a:off x="1080000" y="252000"/>
+            <a:ext cx="0" cy="1296000"/>
+          </a:xfrm>
+          <a:prstGeom prst="line">
+            <a:avLst/>
+          </a:prstGeom>
+          <a:ln w="3600">
+            <a:solidFill>
+              <a:srgbClr val="DAC4FC"/>
+            </a:solidFill>
+          </a:ln>
+        </p:spPr>
+      </p:cxnSp>
+      <p:sp>
+        <p:nvSpPr>
+          <p:cNvPr id="3" name="Rectangle 2"/>
           <p:cNvSpPr/>
           <p:nvPr/>
         </p:nvSpPr>
         <p:spPr>
           <a:xfrm>
-            <a:off x="547200" y="475200"/>
-            <a:ext cx="849600" cy="849600"/>
-          </a:xfrm>
-          <a:prstGeom prst="ellipse">
-            <a:avLst/>
-          </a:prstGeom>
-          <a:solidFill>
-            <a:srgbClr val="E1CFFD"/>
-          </a:solidFill>
-          <a:ln>
-            <a:noFill/>
-          </a:ln>
-        </p:spPr>
-        <p:txBody>
-          <a:bodyPr rtlCol="0" anchor="ctr"/>
-          <a:lstStyle/>
-          <a:p>
-            <a:pPr algn="ctr"/>
-          </a:p>
-        </p:txBody>
-      </p:sp>
-      <p:sp>
-        <p:nvSpPr>
-          <p:cNvPr id="3" name="Oval 2"/>
-          <p:cNvSpPr/>
-          <p:nvPr/>
-        </p:nvSpPr>
-        <p:spPr>
-          <a:xfrm>
-            <a:off x="187200" y="475200"/>
-            <a:ext cx="849600" cy="849600"/>
-          </a:xfrm>
-          <a:prstGeom prst="ellipse">
-            <a:avLst/>
-          </a:prstGeom>
-          <a:solidFill>
-            <a:srgbClr val="7A2CF5">
-              <a:alpha val="92000"/>
-            </a:srgbClr>
-          </a:solidFill>
-          <a:ln>
-            <a:noFill/>
-          </a:ln>
-        </p:spPr>
-        <p:txBody>
-          <a:bodyPr rtlCol="0" anchor="ctr"/>
-          <a:lstStyle/>
-          <a:p>
-            <a:pPr algn="ctr"/>
-          </a:p>
-        </p:txBody>
-      </p:sp>
-      <p:sp>
-        <p:nvSpPr>
-          <p:cNvPr id="4" name="텍스트"/>
-          <p:cNvSpPr txBox="1"/>
-          <p:nvPr/>
-        </p:nvSpPr>
-        <p:spPr>
-          <a:xfrm>
-            <a:off x="1692000" y="223200"/>
-            <a:ext cx="1296000" cy="133351"/>
-          </a:xfrm>
-          <a:prstGeom prst="rect">
-            <a:avLst/>
-          </a:prstGeom>
-          <a:noFill/>
-        </p:spPr>
-        <p:txBody>
-          <a:bodyPr wrap="square" lIns="0" rIns="0" tIns="0" bIns="0" anchor="t">
-            <a:spAutoFit/>
-          </a:bodyPr>
-          <a:lstStyle/>
-          <a:p>
-            <a:pPr algn="l">
-              <a:lnSpc>
-                <a:spcPts val="1015"/>
-              </a:lnSpc>
-            </a:pPr>
-            <a:r>
-              <a:rPr sz="700" b="1" spc="200">
-                <a:solidFill>
-                  <a:srgbClr val="3A1E6E"/>
-                </a:solidFill>
-                <a:latin typeface="맑은 고딕"/>
-                <a:ea typeface="맑은 고딕"/>
-              </a:rPr>
-              <a:t>스튜디오 이름</a:t>
-            </a:r>
-          </a:p>
-        </p:txBody>
-      </p:sp>
-      <p:sp>
-        <p:nvSpPr>
-          <p:cNvPr id="5" name="텍스트"/>
-          <p:cNvSpPr txBox="1"/>
-          <p:nvPr/>
-        </p:nvSpPr>
-        <p:spPr>
-          <a:xfrm>
-            <a:off x="1692000" y="540000"/>
-            <a:ext cx="1368000" cy="360000"/>
-          </a:xfrm>
-          <a:prstGeom prst="rect">
-            <a:avLst/>
-          </a:prstGeom>
-          <a:noFill/>
-        </p:spPr>
-        <p:txBody>
-          <a:bodyPr wrap="square" lIns="0" rIns="0" tIns="0" bIns="0" anchor="t">
-            <a:spAutoFit/>
-          </a:bodyPr>
-          <a:lstStyle/>
-          <a:p>
-            <a:pPr algn="l">
-              <a:lnSpc>
-                <a:spcPts val="3190"/>
-              </a:lnSpc>
-            </a:pPr>
-            <a:r>
-              <a:rPr sz="2200" b="1">
-                <a:solidFill>
-                  <a:srgbClr val="12151C"/>
-                </a:solidFill>
-                <a:latin typeface="맑은 고딕"/>
-                <a:ea typeface="맑은 고딕"/>
-              </a:rPr>
-              <a:t>조하린</a:t>
-            </a:r>
-          </a:p>
-        </p:txBody>
-      </p:sp>
-      <p:sp>
-        <p:nvSpPr>
-          <p:cNvPr id="6" name="텍스트"/>
-          <p:cNvSpPr txBox="1"/>
-          <p:nvPr/>
-        </p:nvSpPr>
-        <p:spPr>
-          <a:xfrm>
-            <a:off x="1692000" y="943200"/>
-            <a:ext cx="1368000" cy="171451"/>
-          </a:xfrm>
-          <a:prstGeom prst="rect">
-            <a:avLst/>
-          </a:prstGeom>
-          <a:noFill/>
-        </p:spPr>
-        <p:txBody>
-          <a:bodyPr wrap="square" lIns="0" rIns="0" tIns="0" bIns="0" anchor="t">
-            <a:spAutoFit/>
-          </a:bodyPr>
-          <a:lstStyle/>
-          <a:p>
-            <a:pPr algn="l">
-              <a:lnSpc>
-                <a:spcPts val="1305"/>
-              </a:lnSpc>
-            </a:pPr>
-            <a:r>
-              <a:rPr sz="900" b="0">
-                <a:solidFill>
-                  <a:srgbClr val="3A1E6E"/>
-                </a:solidFill>
-                <a:latin typeface="맑은 고딕"/>
-                <a:ea typeface="맑은 고딕"/>
-              </a:rPr>
-              <a:t>포토그래퍼</a:t>
-            </a:r>
-          </a:p>
-        </p:txBody>
-      </p:sp>
-      <p:sp>
-        <p:nvSpPr>
-          <p:cNvPr id="7" name="Rectangle 6"/>
-          <p:cNvSpPr/>
-          <p:nvPr/>
-        </p:nvSpPr>
-        <p:spPr>
-          <a:xfrm>
-            <a:off x="1692000" y="1195200"/>
-            <a:ext cx="144000" cy="18000"/>
+            <a:off x="1069200" y="252000"/>
+            <a:ext cx="21600" cy="201600"/>
           </a:xfrm>
           <a:prstGeom prst="rect">
             <a:avLst/>
@@ -3308,14 +3149,14 @@
       </p:sp>
       <p:sp>
         <p:nvSpPr>
-          <p:cNvPr id="8" name="텍스트"/>
+          <p:cNvPr id="4" name="텍스트"/>
           <p:cNvSpPr txBox="1"/>
           <p:nvPr/>
         </p:nvSpPr>
         <p:spPr>
           <a:xfrm>
-            <a:off x="1692000" y="1328400"/>
-            <a:ext cx="331200" cy="99061"/>
+            <a:off x="252000" y="252000"/>
+            <a:ext cx="756000" cy="123826"/>
           </a:xfrm>
           <a:prstGeom prst="rect">
             <a:avLst/>
@@ -3330,11 +3171,221 @@
           <a:p>
             <a:pPr algn="l">
               <a:lnSpc>
-                <a:spcPts val="754"/>
+                <a:spcPts val="942"/>
               </a:lnSpc>
             </a:pPr>
             <a:r>
-              <a:rPr sz="520" b="1" spc="120">
+              <a:rPr sz="650" b="1" spc="220">
+                <a:solidFill>
+                  <a:srgbClr val="3A1E6E"/>
+                </a:solidFill>
+                <a:latin typeface="맑은 고딕"/>
+                <a:ea typeface="맑은 고딕"/>
+              </a:rPr>
+              <a:t>스튜디오 이름</a:t>
+            </a:r>
+          </a:p>
+        </p:txBody>
+      </p:sp>
+      <p:sp>
+        <p:nvSpPr>
+          <p:cNvPr id="5" name="Oval 4"/>
+          <p:cNvSpPr/>
+          <p:nvPr/>
+        </p:nvSpPr>
+        <p:spPr>
+          <a:xfrm>
+            <a:off x="273600" y="734400"/>
+            <a:ext cx="244800" cy="244800"/>
+          </a:xfrm>
+          <a:prstGeom prst="ellipse">
+            <a:avLst/>
+          </a:prstGeom>
+          <a:noFill/>
+          <a:ln w="5040">
+            <a:solidFill>
+              <a:srgbClr val="7A2CF5"/>
+            </a:solidFill>
+          </a:ln>
+        </p:spPr>
+        <p:txBody>
+          <a:bodyPr rtlCol="0" anchor="ctr"/>
+          <a:lstStyle/>
+          <a:p>
+            <a:pPr algn="ctr"/>
+          </a:p>
+        </p:txBody>
+      </p:sp>
+      <p:sp>
+        <p:nvSpPr>
+          <p:cNvPr id="6" name="텍스트"/>
+          <p:cNvSpPr txBox="1"/>
+          <p:nvPr/>
+        </p:nvSpPr>
+        <p:spPr>
+          <a:xfrm>
+            <a:off x="252000" y="734400"/>
+            <a:ext cx="288000" cy="252000"/>
+          </a:xfrm>
+          <a:prstGeom prst="rect">
+            <a:avLst/>
+          </a:prstGeom>
+          <a:noFill/>
+        </p:spPr>
+        <p:txBody>
+          <a:bodyPr wrap="square" lIns="0" rIns="0" tIns="0" bIns="0" anchor="ctr">
+            <a:spAutoFit/>
+          </a:bodyPr>
+          <a:lstStyle/>
+          <a:p>
+            <a:pPr algn="ctr">
+              <a:lnSpc>
+                <a:spcPts val="1305"/>
+              </a:lnSpc>
+            </a:pPr>
+            <a:r>
+              <a:rPr sz="900" b="1">
+                <a:solidFill>
+                  <a:srgbClr val="7A2CF5"/>
+                </a:solidFill>
+                <a:latin typeface="맑은 고딕"/>
+                <a:ea typeface="맑은 고딕"/>
+              </a:rPr>
+              <a:t>스</a:t>
+            </a:r>
+          </a:p>
+        </p:txBody>
+      </p:sp>
+      <p:sp>
+        <p:nvSpPr>
+          <p:cNvPr id="7" name="텍스트"/>
+          <p:cNvSpPr txBox="1"/>
+          <p:nvPr/>
+        </p:nvSpPr>
+        <p:spPr>
+          <a:xfrm>
+            <a:off x="1260000" y="432000"/>
+            <a:ext cx="1800000" cy="237600"/>
+          </a:xfrm>
+          <a:prstGeom prst="rect">
+            <a:avLst/>
+          </a:prstGeom>
+          <a:noFill/>
+        </p:spPr>
+        <p:txBody>
+          <a:bodyPr wrap="square" lIns="0" rIns="0" tIns="0" bIns="0" anchor="t">
+            <a:spAutoFit/>
+          </a:bodyPr>
+          <a:lstStyle/>
+          <a:p>
+            <a:pPr algn="l">
+              <a:lnSpc>
+                <a:spcPts val="1957"/>
+              </a:lnSpc>
+            </a:pPr>
+            <a:r>
+              <a:rPr sz="1350" b="1" spc="120">
+                <a:solidFill>
+                  <a:srgbClr val="12151C"/>
+                </a:solidFill>
+                <a:latin typeface="맑은 고딕"/>
+                <a:ea typeface="맑은 고딕"/>
+              </a:rPr>
+              <a:t>조하린</a:t>
+            </a:r>
+          </a:p>
+        </p:txBody>
+      </p:sp>
+      <p:sp>
+        <p:nvSpPr>
+          <p:cNvPr id="8" name="텍스트"/>
+          <p:cNvSpPr txBox="1"/>
+          <p:nvPr/>
+        </p:nvSpPr>
+        <p:spPr>
+          <a:xfrm>
+            <a:off x="1260000" y="684000"/>
+            <a:ext cx="1800000" cy="133351"/>
+          </a:xfrm>
+          <a:prstGeom prst="rect">
+            <a:avLst/>
+          </a:prstGeom>
+          <a:noFill/>
+        </p:spPr>
+        <p:txBody>
+          <a:bodyPr wrap="square" lIns="0" rIns="0" tIns="0" bIns="0" anchor="t">
+            <a:spAutoFit/>
+          </a:bodyPr>
+          <a:lstStyle/>
+          <a:p>
+            <a:pPr algn="l">
+              <a:lnSpc>
+                <a:spcPts val="1015"/>
+              </a:lnSpc>
+            </a:pPr>
+            <a:r>
+              <a:rPr sz="700" b="0" spc="60">
+                <a:solidFill>
+                  <a:srgbClr val="3A1E6E"/>
+                </a:solidFill>
+                <a:latin typeface="맑은 고딕"/>
+                <a:ea typeface="맑은 고딕"/>
+              </a:rPr>
+              <a:t>포토그래퍼</a:t>
+            </a:r>
+          </a:p>
+        </p:txBody>
+      </p:sp>
+      <p:cxnSp>
+        <p:nvCxnSpPr>
+          <p:cNvPr id="9" name="Connector 8"/>
+          <p:cNvCxnSpPr/>
+          <p:nvPr/>
+        </p:nvCxnSpPr>
+        <p:spPr>
+          <a:xfrm>
+            <a:off x="1260000" y="943200"/>
+            <a:ext cx="1728000" cy="0"/>
+          </a:xfrm>
+          <a:prstGeom prst="line">
+            <a:avLst/>
+          </a:prstGeom>
+          <a:ln w="3600">
+            <a:solidFill>
+              <a:srgbClr val="DAC4FC"/>
+            </a:solidFill>
+          </a:ln>
+        </p:spPr>
+      </p:cxnSp>
+      <p:sp>
+        <p:nvSpPr>
+          <p:cNvPr id="10" name="텍스트"/>
+          <p:cNvSpPr txBox="1"/>
+          <p:nvPr/>
+        </p:nvSpPr>
+        <p:spPr>
+          <a:xfrm>
+            <a:off x="1260000" y="1054800"/>
+            <a:ext cx="331200" cy="91441"/>
+          </a:xfrm>
+          <a:prstGeom prst="rect">
+            <a:avLst/>
+          </a:prstGeom>
+          <a:noFill/>
+        </p:spPr>
+        <p:txBody>
+          <a:bodyPr wrap="square" lIns="0" rIns="0" tIns="0" bIns="0" anchor="t">
+            <a:spAutoFit/>
+          </a:bodyPr>
+          <a:lstStyle/>
+          <a:p>
+            <a:pPr algn="l">
+              <a:lnSpc>
+                <a:spcPts val="696"/>
+              </a:lnSpc>
+            </a:pPr>
+            <a:r>
+              <a:rPr sz="480" b="1" spc="140">
                 <a:solidFill>
                   <a:srgbClr val="3A1E6E"/>
                 </a:solidFill>
@@ -3348,14 +3399,14 @@
       </p:sp>
       <p:sp>
         <p:nvSpPr>
-          <p:cNvPr id="9" name="텍스트"/>
+          <p:cNvPr id="11" name="텍스트"/>
           <p:cNvSpPr txBox="1"/>
           <p:nvPr/>
         </p:nvSpPr>
         <p:spPr>
           <a:xfrm>
-            <a:off x="2023200" y="1317600"/>
-            <a:ext cx="1188000" cy="125731"/>
+            <a:off x="1591200" y="1044000"/>
+            <a:ext cx="1188000" cy="123826"/>
           </a:xfrm>
           <a:prstGeom prst="rect">
             <a:avLst/>
@@ -3370,11 +3421,11 @@
           <a:p>
             <a:pPr algn="l">
               <a:lnSpc>
-                <a:spcPts val="956"/>
+                <a:spcPts val="942"/>
               </a:lnSpc>
             </a:pPr>
             <a:r>
-              <a:rPr sz="660" b="0">
+              <a:rPr sz="650" b="0">
                 <a:solidFill>
                   <a:srgbClr val="12151C"/>
                 </a:solidFill>
@@ -3388,14 +3439,14 @@
       </p:sp>
       <p:sp>
         <p:nvSpPr>
-          <p:cNvPr id="10" name="텍스트"/>
+          <p:cNvPr id="12" name="텍스트"/>
           <p:cNvSpPr txBox="1"/>
           <p:nvPr/>
         </p:nvSpPr>
         <p:spPr>
           <a:xfrm>
-            <a:off x="1692000" y="1458000"/>
-            <a:ext cx="331200" cy="99061"/>
+            <a:off x="1260000" y="1184400"/>
+            <a:ext cx="331200" cy="91441"/>
           </a:xfrm>
           <a:prstGeom prst="rect">
             <a:avLst/>
@@ -3410,11 +3461,11 @@
           <a:p>
             <a:pPr algn="l">
               <a:lnSpc>
-                <a:spcPts val="754"/>
+                <a:spcPts val="696"/>
               </a:lnSpc>
             </a:pPr>
             <a:r>
-              <a:rPr sz="520" b="1" spc="120">
+              <a:rPr sz="480" b="1" spc="140">
                 <a:solidFill>
                   <a:srgbClr val="3A1E6E"/>
                 </a:solidFill>
@@ -3428,14 +3479,14 @@
       </p:sp>
       <p:sp>
         <p:nvSpPr>
-          <p:cNvPr id="11" name="텍스트"/>
+          <p:cNvPr id="13" name="텍스트"/>
           <p:cNvSpPr txBox="1"/>
           <p:nvPr/>
         </p:nvSpPr>
         <p:spPr>
           <a:xfrm>
-            <a:off x="2023200" y="1447200"/>
-            <a:ext cx="1188000" cy="125731"/>
+            <a:off x="1591200" y="1173600"/>
+            <a:ext cx="1188000" cy="123826"/>
           </a:xfrm>
           <a:prstGeom prst="rect">
             <a:avLst/>
@@ -3450,11 +3501,11 @@
           <a:p>
             <a:pPr algn="l">
               <a:lnSpc>
-                <a:spcPts val="956"/>
+                <a:spcPts val="942"/>
               </a:lnSpc>
             </a:pPr>
             <a:r>
-              <a:rPr sz="660" b="0">
+              <a:rPr sz="650" b="0">
                 <a:solidFill>
                   <a:srgbClr val="12151C"/>
                 </a:solidFill>
@@ -3468,14 +3519,14 @@
       </p:sp>
       <p:sp>
         <p:nvSpPr>
-          <p:cNvPr id="12" name="텍스트"/>
+          <p:cNvPr id="14" name="텍스트"/>
           <p:cNvSpPr txBox="1"/>
           <p:nvPr/>
         </p:nvSpPr>
         <p:spPr>
           <a:xfrm>
-            <a:off x="1692000" y="1587600"/>
-            <a:ext cx="331200" cy="99061"/>
+            <a:off x="1260000" y="1314000"/>
+            <a:ext cx="331200" cy="91441"/>
           </a:xfrm>
           <a:prstGeom prst="rect">
             <a:avLst/>
@@ -3490,11 +3541,11 @@
           <a:p>
             <a:pPr algn="l">
               <a:lnSpc>
-                <a:spcPts val="754"/>
+                <a:spcPts val="696"/>
               </a:lnSpc>
             </a:pPr>
             <a:r>
-              <a:rPr sz="520" b="1" spc="120">
+              <a:rPr sz="480" b="1" spc="140">
                 <a:solidFill>
                   <a:srgbClr val="3A1E6E"/>
                 </a:solidFill>
@@ -3508,14 +3559,14 @@
       </p:sp>
       <p:sp>
         <p:nvSpPr>
-          <p:cNvPr id="13" name="텍스트"/>
+          <p:cNvPr id="15" name="텍스트"/>
           <p:cNvSpPr txBox="1"/>
           <p:nvPr/>
         </p:nvSpPr>
         <p:spPr>
           <a:xfrm>
-            <a:off x="2023200" y="1576800"/>
-            <a:ext cx="1188000" cy="125731"/>
+            <a:off x="1591200" y="1303200"/>
+            <a:ext cx="1188000" cy="123826"/>
           </a:xfrm>
           <a:prstGeom prst="rect">
             <a:avLst/>
@@ -3530,11 +3581,11 @@
           <a:p>
             <a:pPr algn="l">
               <a:lnSpc>
-                <a:spcPts val="956"/>
+                <a:spcPts val="942"/>
               </a:lnSpc>
             </a:pPr>
             <a:r>
-              <a:rPr sz="660" b="0">
+              <a:rPr sz="650" b="0">
                 <a:solidFill>
                   <a:srgbClr val="12151C"/>
                 </a:solidFill>
@@ -3580,8 +3631,8 @@
         </p:nvSpPr>
         <p:spPr>
           <a:xfrm>
-            <a:off x="252000" y="324000"/>
-            <a:ext cx="2520000" cy="792000"/>
+            <a:off x="252000" y="252000"/>
+            <a:ext cx="1080000" cy="99061"/>
           </a:xfrm>
           <a:prstGeom prst="rect">
             <a:avLst/>
@@ -3596,35 +3647,18 @@
           <a:p>
             <a:pPr algn="l">
               <a:lnSpc>
-                <a:spcPts val="1884"/>
+                <a:spcPts val="754"/>
               </a:lnSpc>
             </a:pPr>
             <a:r>
-              <a:rPr sz="1300" b="1">
+              <a:rPr sz="520" b="1" spc="240">
                 <a:solidFill>
-                  <a:srgbClr val="FFFFFF"/>
+                  <a:srgbClr val="A3A9B5"/>
                 </a:solidFill>
                 <a:latin typeface="맑은 고딕"/>
                 <a:ea typeface="맑은 고딕"/>
               </a:rPr>
-              <a:t>보이지 않던 가치를</a:t>
-            </a:r>
-          </a:p>
-          <a:p>
-            <a:pPr algn="l">
-              <a:lnSpc>
-                <a:spcPts val="1884"/>
-              </a:lnSpc>
-            </a:pPr>
-            <a:r>
-              <a:rPr sz="1300" b="1">
-                <a:solidFill>
-                  <a:srgbClr val="FFFFFF"/>
-                </a:solidFill>
-                <a:latin typeface="맑은 고딕"/>
-                <a:ea typeface="맑은 고딕"/>
-              </a:rPr>
-              <a:t>보이게 합니다</a:t>
+              <a:t>작업 분야</a:t>
             </a:r>
           </a:p>
         </p:txBody>
@@ -3637,8 +3671,8 @@
         </p:nvSpPr>
         <p:spPr>
           <a:xfrm>
-            <a:off x="0" y="1476000"/>
-            <a:ext cx="3240000" cy="324000"/>
+            <a:off x="252000" y="352800"/>
+            <a:ext cx="108000" cy="14400"/>
           </a:xfrm>
           <a:prstGeom prst="rect">
             <a:avLst/>
@@ -3658,16 +3692,37 @@
           </a:p>
         </p:txBody>
       </p:sp>
-      <p:sp>
-        <p:nvSpPr>
-          <p:cNvPr id="4" name="텍스트"/>
+      <p:cxnSp>
+        <p:nvCxnSpPr>
+          <p:cNvPr id="4" name="Connector 3"/>
+          <p:cNvCxnSpPr/>
+          <p:nvPr/>
+        </p:nvCxnSpPr>
+        <p:spPr>
+          <a:xfrm>
+            <a:off x="252000" y="468000"/>
+            <a:ext cx="1512000" cy="0"/>
+          </a:xfrm>
+          <a:prstGeom prst="line">
+            <a:avLst/>
+          </a:prstGeom>
+          <a:ln w="3600">
+            <a:solidFill>
+              <a:srgbClr val="2A2F38"/>
+            </a:solidFill>
+          </a:ln>
+        </p:spPr>
+      </p:cxnSp>
+      <p:sp>
+        <p:nvSpPr>
+          <p:cNvPr id="5" name="텍스트"/>
           <p:cNvSpPr txBox="1"/>
           <p:nvPr/>
         </p:nvSpPr>
         <p:spPr>
           <a:xfrm>
-            <a:off x="252000" y="1569600"/>
-            <a:ext cx="1872000" cy="142876"/>
+            <a:off x="252000" y="511200"/>
+            <a:ext cx="1260000" cy="133351"/>
           </a:xfrm>
           <a:prstGeom prst="rect">
             <a:avLst/>
@@ -3682,41 +3737,246 @@
           <a:p>
             <a:pPr algn="l">
               <a:lnSpc>
-                <a:spcPts val="1087"/>
+                <a:spcPts val="1015"/>
               </a:lnSpc>
             </a:pPr>
             <a:r>
-              <a:rPr sz="750" b="1" spc="200">
+              <a:rPr sz="700" b="0">
                 <a:solidFill>
                   <a:srgbClr val="FFFFFF"/>
                 </a:solidFill>
                 <a:latin typeface="맑은 고딕"/>
                 <a:ea typeface="맑은 고딕"/>
               </a:rPr>
-              <a:t>스튜디오 이름</a:t>
-            </a:r>
-          </a:p>
-        </p:txBody>
-      </p:sp>
-      <p:sp>
-        <p:nvSpPr>
-          <p:cNvPr id="5" name="Oval 4"/>
+              <a:t>로고 디자인</a:t>
+            </a:r>
+          </a:p>
+        </p:txBody>
+      </p:sp>
+      <p:cxnSp>
+        <p:nvCxnSpPr>
+          <p:cNvPr id="6" name="Connector 5"/>
+          <p:cNvCxnSpPr/>
+          <p:nvPr/>
+        </p:nvCxnSpPr>
+        <p:spPr>
+          <a:xfrm>
+            <a:off x="252000" y="655200"/>
+            <a:ext cx="1512000" cy="0"/>
+          </a:xfrm>
+          <a:prstGeom prst="line">
+            <a:avLst/>
+          </a:prstGeom>
+          <a:ln w="3600">
+            <a:solidFill>
+              <a:srgbClr val="2A2F38"/>
+            </a:solidFill>
+          </a:ln>
+        </p:spPr>
+      </p:cxnSp>
+      <p:sp>
+        <p:nvSpPr>
+          <p:cNvPr id="7" name="텍스트"/>
+          <p:cNvSpPr txBox="1"/>
+          <p:nvPr/>
+        </p:nvSpPr>
+        <p:spPr>
+          <a:xfrm>
+            <a:off x="252000" y="698400"/>
+            <a:ext cx="1260000" cy="133351"/>
+          </a:xfrm>
+          <a:prstGeom prst="rect">
+            <a:avLst/>
+          </a:prstGeom>
+          <a:noFill/>
+        </p:spPr>
+        <p:txBody>
+          <a:bodyPr wrap="square" lIns="0" rIns="0" tIns="0" bIns="0" anchor="t">
+            <a:spAutoFit/>
+          </a:bodyPr>
+          <a:lstStyle/>
+          <a:p>
+            <a:pPr algn="l">
+              <a:lnSpc>
+                <a:spcPts val="1015"/>
+              </a:lnSpc>
+            </a:pPr>
+            <a:r>
+              <a:rPr sz="700" b="0">
+                <a:solidFill>
+                  <a:srgbClr val="FFFFFF"/>
+                </a:solidFill>
+                <a:latin typeface="맑은 고딕"/>
+                <a:ea typeface="맑은 고딕"/>
+              </a:rPr>
+              <a:t>일러스트</a:t>
+            </a:r>
+          </a:p>
+        </p:txBody>
+      </p:sp>
+      <p:cxnSp>
+        <p:nvCxnSpPr>
+          <p:cNvPr id="8" name="Connector 7"/>
+          <p:cNvCxnSpPr/>
+          <p:nvPr/>
+        </p:nvCxnSpPr>
+        <p:spPr>
+          <a:xfrm>
+            <a:off x="252000" y="842400"/>
+            <a:ext cx="1512000" cy="0"/>
+          </a:xfrm>
+          <a:prstGeom prst="line">
+            <a:avLst/>
+          </a:prstGeom>
+          <a:ln w="3600">
+            <a:solidFill>
+              <a:srgbClr val="2A2F38"/>
+            </a:solidFill>
+          </a:ln>
+        </p:spPr>
+      </p:cxnSp>
+      <p:sp>
+        <p:nvSpPr>
+          <p:cNvPr id="9" name="텍스트"/>
+          <p:cNvSpPr txBox="1"/>
+          <p:nvPr/>
+        </p:nvSpPr>
+        <p:spPr>
+          <a:xfrm>
+            <a:off x="252000" y="885600"/>
+            <a:ext cx="1260000" cy="133351"/>
+          </a:xfrm>
+          <a:prstGeom prst="rect">
+            <a:avLst/>
+          </a:prstGeom>
+          <a:noFill/>
+        </p:spPr>
+        <p:txBody>
+          <a:bodyPr wrap="square" lIns="0" rIns="0" tIns="0" bIns="0" anchor="t">
+            <a:spAutoFit/>
+          </a:bodyPr>
+          <a:lstStyle/>
+          <a:p>
+            <a:pPr algn="l">
+              <a:lnSpc>
+                <a:spcPts val="1015"/>
+              </a:lnSpc>
+            </a:pPr>
+            <a:r>
+              <a:rPr sz="700" b="0">
+                <a:solidFill>
+                  <a:srgbClr val="FFFFFF"/>
+                </a:solidFill>
+                <a:latin typeface="맑은 고딕"/>
+                <a:ea typeface="맑은 고딕"/>
+              </a:rPr>
+              <a:t>모션 그래픽</a:t>
+            </a:r>
+          </a:p>
+        </p:txBody>
+      </p:sp>
+      <p:cxnSp>
+        <p:nvCxnSpPr>
+          <p:cNvPr id="10" name="Connector 9"/>
+          <p:cNvCxnSpPr/>
+          <p:nvPr/>
+        </p:nvCxnSpPr>
+        <p:spPr>
+          <a:xfrm>
+            <a:off x="252000" y="1029600"/>
+            <a:ext cx="1512000" cy="0"/>
+          </a:xfrm>
+          <a:prstGeom prst="line">
+            <a:avLst/>
+          </a:prstGeom>
+          <a:ln w="3600">
+            <a:solidFill>
+              <a:srgbClr val="2A2F38"/>
+            </a:solidFill>
+          </a:ln>
+        </p:spPr>
+      </p:cxnSp>
+      <p:sp>
+        <p:nvSpPr>
+          <p:cNvPr id="11" name="텍스트"/>
+          <p:cNvSpPr txBox="1"/>
+          <p:nvPr/>
+        </p:nvSpPr>
+        <p:spPr>
+          <a:xfrm>
+            <a:off x="252000" y="1072800"/>
+            <a:ext cx="1260000" cy="133351"/>
+          </a:xfrm>
+          <a:prstGeom prst="rect">
+            <a:avLst/>
+          </a:prstGeom>
+          <a:noFill/>
+        </p:spPr>
+        <p:txBody>
+          <a:bodyPr wrap="square" lIns="0" rIns="0" tIns="0" bIns="0" anchor="t">
+            <a:spAutoFit/>
+          </a:bodyPr>
+          <a:lstStyle/>
+          <a:p>
+            <a:pPr algn="l">
+              <a:lnSpc>
+                <a:spcPts val="1015"/>
+              </a:lnSpc>
+            </a:pPr>
+            <a:r>
+              <a:rPr sz="700" b="0">
+                <a:solidFill>
+                  <a:srgbClr val="FFFFFF"/>
+                </a:solidFill>
+                <a:latin typeface="맑은 고딕"/>
+                <a:ea typeface="맑은 고딕"/>
+              </a:rPr>
+              <a:t>제품 촬영</a:t>
+            </a:r>
+          </a:p>
+        </p:txBody>
+      </p:sp>
+      <p:cxnSp>
+        <p:nvCxnSpPr>
+          <p:cNvPr id="12" name="Connector 11"/>
+          <p:cNvCxnSpPr/>
+          <p:nvPr/>
+        </p:nvCxnSpPr>
+        <p:spPr>
+          <a:xfrm>
+            <a:off x="252000" y="1216800"/>
+            <a:ext cx="1512000" cy="0"/>
+          </a:xfrm>
+          <a:prstGeom prst="line">
+            <a:avLst/>
+          </a:prstGeom>
+          <a:ln w="3600">
+            <a:solidFill>
+              <a:srgbClr val="2A2F38"/>
+            </a:solidFill>
+          </a:ln>
+        </p:spPr>
+      </p:cxnSp>
+      <p:sp>
+        <p:nvSpPr>
+          <p:cNvPr id="13" name="Rectangle 12"/>
           <p:cNvSpPr/>
           <p:nvPr/>
         </p:nvSpPr>
         <p:spPr>
           <a:xfrm>
-            <a:off x="2714400" y="1616400"/>
-            <a:ext cx="43200" cy="43200"/>
-          </a:xfrm>
-          <a:prstGeom prst="ellipse">
+            <a:off x="2196000" y="396000"/>
+            <a:ext cx="720000" cy="720000"/>
+          </a:xfrm>
+          <a:prstGeom prst="rect">
             <a:avLst/>
           </a:prstGeom>
-          <a:solidFill>
-            <a:srgbClr val="FFFFFF"/>
-          </a:solidFill>
-          <a:ln>
-            <a:noFill/>
+          <a:noFill/>
+          <a:ln w="4320">
+            <a:solidFill>
+              <a:srgbClr val="A3A9B5"/>
+            </a:solidFill>
+            <a:prstDash val="dash"/>
           </a:ln>
         </p:spPr>
         <p:txBody>
@@ -3729,63 +3989,121 @@
       </p:sp>
       <p:sp>
         <p:nvSpPr>
-          <p:cNvPr id="6" name="Oval 5"/>
-          <p:cNvSpPr/>
+          <p:cNvPr id="14" name="텍스트"/>
+          <p:cNvSpPr txBox="1"/>
           <p:nvPr/>
         </p:nvSpPr>
         <p:spPr>
           <a:xfrm>
-            <a:off x="2822400" y="1616400"/>
-            <a:ext cx="43200" cy="43200"/>
-          </a:xfrm>
-          <a:prstGeom prst="ellipse">
+            <a:off x="2196000" y="396000"/>
+            <a:ext cx="720000" cy="720000"/>
+          </a:xfrm>
+          <a:prstGeom prst="rect">
             <a:avLst/>
           </a:prstGeom>
-          <a:solidFill>
-            <a:srgbClr val="FFFFFF">
-              <a:alpha val="50000"/>
-            </a:srgbClr>
-          </a:solidFill>
-          <a:ln>
-            <a:noFill/>
-          </a:ln>
-        </p:spPr>
-        <p:txBody>
-          <a:bodyPr rtlCol="0" anchor="ctr"/>
-          <a:lstStyle/>
-          <a:p>
-            <a:pPr algn="ctr"/>
-          </a:p>
-        </p:txBody>
-      </p:sp>
-      <p:sp>
-        <p:nvSpPr>
-          <p:cNvPr id="7" name="Oval 6"/>
-          <p:cNvSpPr/>
+          <a:noFill/>
+        </p:spPr>
+        <p:txBody>
+          <a:bodyPr wrap="square" lIns="0" rIns="0" tIns="0" bIns="0" anchor="ctr">
+            <a:spAutoFit/>
+          </a:bodyPr>
+          <a:lstStyle/>
+          <a:p>
+            <a:pPr algn="ctr">
+              <a:lnSpc>
+                <a:spcPts val="1305"/>
+              </a:lnSpc>
+            </a:pPr>
+            <a:r>
+              <a:rPr sz="900" b="1">
+                <a:solidFill>
+                  <a:srgbClr val="A3A9B5"/>
+                </a:solidFill>
+                <a:latin typeface="맑은 고딕"/>
+                <a:ea typeface="맑은 고딕"/>
+              </a:rPr>
+              <a:t>QR</a:t>
+            </a:r>
+          </a:p>
+        </p:txBody>
+      </p:sp>
+      <p:sp>
+        <p:nvSpPr>
+          <p:cNvPr id="15" name="텍스트"/>
+          <p:cNvSpPr txBox="1"/>
           <p:nvPr/>
         </p:nvSpPr>
         <p:spPr>
           <a:xfrm>
-            <a:off x="2930400" y="1616400"/>
-            <a:ext cx="43200" cy="43200"/>
-          </a:xfrm>
-          <a:prstGeom prst="ellipse">
+            <a:off x="2196000" y="1209600"/>
+            <a:ext cx="720000" cy="118111"/>
+          </a:xfrm>
+          <a:prstGeom prst="rect">
             <a:avLst/>
           </a:prstGeom>
-          <a:solidFill>
-            <a:srgbClr val="FFFFFF">
-              <a:alpha val="50000"/>
-            </a:srgbClr>
-          </a:solidFill>
-          <a:ln>
-            <a:noFill/>
-          </a:ln>
-        </p:spPr>
-        <p:txBody>
-          <a:bodyPr rtlCol="0" anchor="ctr"/>
-          <a:lstStyle/>
-          <a:p>
-            <a:pPr algn="ctr"/>
+          <a:noFill/>
+        </p:spPr>
+        <p:txBody>
+          <a:bodyPr wrap="square" lIns="0" rIns="0" tIns="0" bIns="0" anchor="t">
+            <a:spAutoFit/>
+          </a:bodyPr>
+          <a:lstStyle/>
+          <a:p>
+            <a:pPr algn="ctr">
+              <a:lnSpc>
+                <a:spcPts val="899"/>
+              </a:lnSpc>
+            </a:pPr>
+            <a:r>
+              <a:rPr sz="620" b="0">
+                <a:solidFill>
+                  <a:srgbClr val="FFFFFF"/>
+                </a:solidFill>
+                <a:latin typeface="맑은 고딕"/>
+                <a:ea typeface="맑은 고딕"/>
+              </a:rPr>
+              <a:t>@아이디</a:t>
+            </a:r>
+          </a:p>
+        </p:txBody>
+      </p:sp>
+      <p:sp>
+        <p:nvSpPr>
+          <p:cNvPr id="16" name="텍스트"/>
+          <p:cNvSpPr txBox="1"/>
+          <p:nvPr/>
+        </p:nvSpPr>
+        <p:spPr>
+          <a:xfrm>
+            <a:off x="2196000" y="1353600"/>
+            <a:ext cx="720000" cy="118111"/>
+          </a:xfrm>
+          <a:prstGeom prst="rect">
+            <a:avLst/>
+          </a:prstGeom>
+          <a:noFill/>
+        </p:spPr>
+        <p:txBody>
+          <a:bodyPr wrap="square" lIns="0" rIns="0" tIns="0" bIns="0" anchor="t">
+            <a:spAutoFit/>
+          </a:bodyPr>
+          <a:lstStyle/>
+          <a:p>
+            <a:pPr algn="ctr">
+              <a:lnSpc>
+                <a:spcPts val="899"/>
+              </a:lnSpc>
+            </a:pPr>
+            <a:r>
+              <a:rPr sz="620" b="0">
+                <a:solidFill>
+                  <a:srgbClr val="A3A9B5"/>
+                </a:solidFill>
+                <a:latin typeface="맑은 고딕"/>
+                <a:ea typeface="맑은 고딕"/>
+              </a:rPr>
+              <a:t>평일 10:00 – 19:00</a:t>
+            </a:r>
           </a:p>
         </p:txBody>
       </p:sp>
